--- a/宣道詩/(宣道詩263) 聖餐.pptx
+++ b/宣道詩/(宣道詩263) 聖餐.pptx
@@ -322,6 +322,11 @@
         </p:txBody>
       </p:sp>
     </p:spTree>
+    <p:extLst>
+      <p:ext uri="{BB962C8B-B14F-4D97-AF65-F5344CB8AC3E}">
+        <p14:creationId xmlns:p14="http://schemas.microsoft.com/office/powerpoint/2010/main" val="1"/>
+      </p:ext>
+    </p:extLst>
   </p:cSld>
   <p:clrMap bg1="lt1" tx1="dk1" bg2="lt2" tx2="dk2" accent1="accent1" accent2="accent2" accent3="accent3" accent4="accent4" accent5="accent5" accent6="accent6" hlink="hlink" folHlink="folHlink"/>
 </p:handoutMaster>
@@ -471,38 +476,37 @@
           <a:p>
             <a:pPr lvl="0"/>
             <a:r>
-              <a:rPr lang="zh-TW" altLang="en-US" smtClean="0"/>
+              <a:rPr lang="zh-TW" altLang="en-US"/>
               <a:t>按一下以編輯母片文字樣式</a:t>
             </a:r>
           </a:p>
           <a:p>
             <a:pPr lvl="1"/>
             <a:r>
-              <a:rPr lang="zh-TW" altLang="en-US" smtClean="0"/>
+              <a:rPr lang="zh-TW" altLang="en-US"/>
               <a:t>第二層</a:t>
             </a:r>
           </a:p>
           <a:p>
             <a:pPr lvl="2"/>
             <a:r>
-              <a:rPr lang="zh-TW" altLang="en-US" smtClean="0"/>
+              <a:rPr lang="zh-TW" altLang="en-US"/>
               <a:t>第三層</a:t>
             </a:r>
           </a:p>
           <a:p>
             <a:pPr lvl="3"/>
             <a:r>
-              <a:rPr lang="zh-TW" altLang="en-US" smtClean="0"/>
+              <a:rPr lang="zh-TW" altLang="en-US"/>
               <a:t>第四層</a:t>
             </a:r>
           </a:p>
           <a:p>
             <a:pPr lvl="4"/>
             <a:r>
-              <a:rPr lang="zh-TW" altLang="en-US" smtClean="0"/>
+              <a:rPr lang="zh-TW" altLang="en-US"/>
               <a:t>第五層</a:t>
             </a:r>
-            <a:endParaRPr lang="zh-TW" altLang="en-US"/>
           </a:p>
         </p:txBody>
       </p:sp>
@@ -708,7 +712,7 @@
           <a:lstStyle/>
           <a:p>
             <a:r>
-              <a:rPr lang="en-US" altLang="zh-TW" smtClean="0"/>
+              <a:rPr lang="en-US" altLang="zh-TW"/>
               <a:t>Click to edit Master title style</a:t>
             </a:r>
             <a:endParaRPr lang="zh-TW" altLang="en-US"/>
@@ -827,7 +831,7 @@
           </a:lstStyle>
           <a:p>
             <a:r>
-              <a:rPr lang="en-US" altLang="zh-TW" smtClean="0"/>
+              <a:rPr lang="en-US" altLang="zh-TW"/>
               <a:t>Click to edit Master subtitle style</a:t>
             </a:r>
             <a:endParaRPr lang="zh-TW" altLang="en-US"/>
@@ -950,7 +954,7 @@
           <a:lstStyle/>
           <a:p>
             <a:r>
-              <a:rPr lang="en-US" altLang="zh-TW" smtClean="0"/>
+              <a:rPr lang="en-US" altLang="zh-TW"/>
               <a:t>Click to edit Master title style</a:t>
             </a:r>
             <a:endParaRPr lang="zh-TW" altLang="en-US"/>
@@ -974,35 +978,35 @@
           <a:p>
             <a:pPr lvl="0"/>
             <a:r>
-              <a:rPr lang="en-US" altLang="zh-TW" smtClean="0"/>
+              <a:rPr lang="en-US" altLang="zh-TW"/>
               <a:t>Edit Master text styles</a:t>
             </a:r>
           </a:p>
           <a:p>
             <a:pPr lvl="1"/>
             <a:r>
-              <a:rPr lang="en-US" altLang="zh-TW" smtClean="0"/>
+              <a:rPr lang="en-US" altLang="zh-TW"/>
               <a:t>Second level</a:t>
             </a:r>
           </a:p>
           <a:p>
             <a:pPr lvl="2"/>
             <a:r>
-              <a:rPr lang="en-US" altLang="zh-TW" smtClean="0"/>
+              <a:rPr lang="en-US" altLang="zh-TW"/>
               <a:t>Third level</a:t>
             </a:r>
           </a:p>
           <a:p>
             <a:pPr lvl="3"/>
             <a:r>
-              <a:rPr lang="en-US" altLang="zh-TW" smtClean="0"/>
+              <a:rPr lang="en-US" altLang="zh-TW"/>
               <a:t>Fourth level</a:t>
             </a:r>
           </a:p>
           <a:p>
             <a:pPr lvl="4"/>
             <a:r>
-              <a:rPr lang="en-US" altLang="zh-TW" smtClean="0"/>
+              <a:rPr lang="en-US" altLang="zh-TW"/>
               <a:t>Fifth level</a:t>
             </a:r>
             <a:endParaRPr lang="zh-TW" altLang="en-US"/>
@@ -1130,7 +1134,7 @@
           <a:lstStyle/>
           <a:p>
             <a:r>
-              <a:rPr lang="en-US" altLang="zh-TW" smtClean="0"/>
+              <a:rPr lang="en-US" altLang="zh-TW"/>
               <a:t>Click to edit Master title style</a:t>
             </a:r>
             <a:endParaRPr lang="zh-TW" altLang="en-US"/>
@@ -1159,35 +1163,35 @@
           <a:p>
             <a:pPr lvl="0"/>
             <a:r>
-              <a:rPr lang="en-US" altLang="zh-TW" smtClean="0"/>
+              <a:rPr lang="en-US" altLang="zh-TW"/>
               <a:t>Edit Master text styles</a:t>
             </a:r>
           </a:p>
           <a:p>
             <a:pPr lvl="1"/>
             <a:r>
-              <a:rPr lang="en-US" altLang="zh-TW" smtClean="0"/>
+              <a:rPr lang="en-US" altLang="zh-TW"/>
               <a:t>Second level</a:t>
             </a:r>
           </a:p>
           <a:p>
             <a:pPr lvl="2"/>
             <a:r>
-              <a:rPr lang="en-US" altLang="zh-TW" smtClean="0"/>
+              <a:rPr lang="en-US" altLang="zh-TW"/>
               <a:t>Third level</a:t>
             </a:r>
           </a:p>
           <a:p>
             <a:pPr lvl="3"/>
             <a:r>
-              <a:rPr lang="en-US" altLang="zh-TW" smtClean="0"/>
+              <a:rPr lang="en-US" altLang="zh-TW"/>
               <a:t>Fourth level</a:t>
             </a:r>
           </a:p>
           <a:p>
             <a:pPr lvl="4"/>
             <a:r>
-              <a:rPr lang="en-US" altLang="zh-TW" smtClean="0"/>
+              <a:rPr lang="en-US" altLang="zh-TW"/>
               <a:t>Fifth level</a:t>
             </a:r>
             <a:endParaRPr lang="zh-TW" altLang="en-US"/>
@@ -1310,7 +1314,7 @@
           <a:lstStyle/>
           <a:p>
             <a:r>
-              <a:rPr lang="en-US" altLang="zh-TW" smtClean="0"/>
+              <a:rPr lang="en-US" altLang="zh-TW"/>
               <a:t>Click to edit Master title style</a:t>
             </a:r>
             <a:endParaRPr lang="zh-TW" altLang="en-US"/>
@@ -1334,35 +1338,35 @@
           <a:p>
             <a:pPr lvl="0"/>
             <a:r>
-              <a:rPr lang="en-US" altLang="zh-TW" smtClean="0"/>
+              <a:rPr lang="en-US" altLang="zh-TW"/>
               <a:t>Edit Master text styles</a:t>
             </a:r>
           </a:p>
           <a:p>
             <a:pPr lvl="1"/>
             <a:r>
-              <a:rPr lang="en-US" altLang="zh-TW" smtClean="0"/>
+              <a:rPr lang="en-US" altLang="zh-TW"/>
               <a:t>Second level</a:t>
             </a:r>
           </a:p>
           <a:p>
             <a:pPr lvl="2"/>
             <a:r>
-              <a:rPr lang="en-US" altLang="zh-TW" smtClean="0"/>
+              <a:rPr lang="en-US" altLang="zh-TW"/>
               <a:t>Third level</a:t>
             </a:r>
           </a:p>
           <a:p>
             <a:pPr lvl="3"/>
             <a:r>
-              <a:rPr lang="en-US" altLang="zh-TW" smtClean="0"/>
+              <a:rPr lang="en-US" altLang="zh-TW"/>
               <a:t>Fourth level</a:t>
             </a:r>
           </a:p>
           <a:p>
             <a:pPr lvl="4"/>
             <a:r>
-              <a:rPr lang="en-US" altLang="zh-TW" smtClean="0"/>
+              <a:rPr lang="en-US" altLang="zh-TW"/>
               <a:t>Fifth level</a:t>
             </a:r>
             <a:endParaRPr lang="zh-TW" altLang="en-US"/>
@@ -1494,7 +1498,7 @@
           </a:lstStyle>
           <a:p>
             <a:r>
-              <a:rPr lang="en-US" altLang="zh-TW" smtClean="0"/>
+              <a:rPr lang="en-US" altLang="zh-TW"/>
               <a:t>Click to edit Master title style</a:t>
             </a:r>
             <a:endParaRPr lang="zh-TW" altLang="en-US"/>
@@ -1614,7 +1618,7 @@
           <a:p>
             <a:pPr lvl="0"/>
             <a:r>
-              <a:rPr lang="en-US" altLang="zh-TW" smtClean="0"/>
+              <a:rPr lang="en-US" altLang="zh-TW"/>
               <a:t>Edit Master text styles</a:t>
             </a:r>
           </a:p>
@@ -1736,7 +1740,7 @@
           <a:lstStyle/>
           <a:p>
             <a:r>
-              <a:rPr lang="en-US" altLang="zh-TW" smtClean="0"/>
+              <a:rPr lang="en-US" altLang="zh-TW"/>
               <a:t>Click to edit Master title style</a:t>
             </a:r>
             <a:endParaRPr lang="zh-TW" altLang="en-US"/>
@@ -1793,35 +1797,35 @@
           <a:p>
             <a:pPr lvl="0"/>
             <a:r>
-              <a:rPr lang="en-US" altLang="zh-TW" smtClean="0"/>
+              <a:rPr lang="en-US" altLang="zh-TW"/>
               <a:t>Edit Master text styles</a:t>
             </a:r>
           </a:p>
           <a:p>
             <a:pPr lvl="1"/>
             <a:r>
-              <a:rPr lang="en-US" altLang="zh-TW" smtClean="0"/>
+              <a:rPr lang="en-US" altLang="zh-TW"/>
               <a:t>Second level</a:t>
             </a:r>
           </a:p>
           <a:p>
             <a:pPr lvl="2"/>
             <a:r>
-              <a:rPr lang="en-US" altLang="zh-TW" smtClean="0"/>
+              <a:rPr lang="en-US" altLang="zh-TW"/>
               <a:t>Third level</a:t>
             </a:r>
           </a:p>
           <a:p>
             <a:pPr lvl="3"/>
             <a:r>
-              <a:rPr lang="en-US" altLang="zh-TW" smtClean="0"/>
+              <a:rPr lang="en-US" altLang="zh-TW"/>
               <a:t>Fourth level</a:t>
             </a:r>
           </a:p>
           <a:p>
             <a:pPr lvl="4"/>
             <a:r>
-              <a:rPr lang="en-US" altLang="zh-TW" smtClean="0"/>
+              <a:rPr lang="en-US" altLang="zh-TW"/>
               <a:t>Fifth level</a:t>
             </a:r>
             <a:endParaRPr lang="zh-TW" altLang="en-US"/>
@@ -1878,35 +1882,35 @@
           <a:p>
             <a:pPr lvl="0"/>
             <a:r>
-              <a:rPr lang="en-US" altLang="zh-TW" smtClean="0"/>
+              <a:rPr lang="en-US" altLang="zh-TW"/>
               <a:t>Edit Master text styles</a:t>
             </a:r>
           </a:p>
           <a:p>
             <a:pPr lvl="1"/>
             <a:r>
-              <a:rPr lang="en-US" altLang="zh-TW" smtClean="0"/>
+              <a:rPr lang="en-US" altLang="zh-TW"/>
               <a:t>Second level</a:t>
             </a:r>
           </a:p>
           <a:p>
             <a:pPr lvl="2"/>
             <a:r>
-              <a:rPr lang="en-US" altLang="zh-TW" smtClean="0"/>
+              <a:rPr lang="en-US" altLang="zh-TW"/>
               <a:t>Third level</a:t>
             </a:r>
           </a:p>
           <a:p>
             <a:pPr lvl="3"/>
             <a:r>
-              <a:rPr lang="en-US" altLang="zh-TW" smtClean="0"/>
+              <a:rPr lang="en-US" altLang="zh-TW"/>
               <a:t>Fourth level</a:t>
             </a:r>
           </a:p>
           <a:p>
             <a:pPr lvl="4"/>
             <a:r>
-              <a:rPr lang="en-US" altLang="zh-TW" smtClean="0"/>
+              <a:rPr lang="en-US" altLang="zh-TW"/>
               <a:t>Fifth level</a:t>
             </a:r>
             <a:endParaRPr lang="zh-TW" altLang="en-US"/>
@@ -2033,7 +2037,7 @@
           </a:lstStyle>
           <a:p>
             <a:r>
-              <a:rPr lang="en-US" altLang="zh-TW" smtClean="0"/>
+              <a:rPr lang="en-US" altLang="zh-TW"/>
               <a:t>Click to edit Master title style</a:t>
             </a:r>
             <a:endParaRPr lang="zh-TW" altLang="en-US"/>
@@ -2099,7 +2103,7 @@
           <a:p>
             <a:pPr lvl="0"/>
             <a:r>
-              <a:rPr lang="en-US" altLang="zh-TW" smtClean="0"/>
+              <a:rPr lang="en-US" altLang="zh-TW"/>
               <a:t>Edit Master text styles</a:t>
             </a:r>
           </a:p>
@@ -2155,35 +2159,35 @@
           <a:p>
             <a:pPr lvl="0"/>
             <a:r>
-              <a:rPr lang="en-US" altLang="zh-TW" smtClean="0"/>
+              <a:rPr lang="en-US" altLang="zh-TW"/>
               <a:t>Edit Master text styles</a:t>
             </a:r>
           </a:p>
           <a:p>
             <a:pPr lvl="1"/>
             <a:r>
-              <a:rPr lang="en-US" altLang="zh-TW" smtClean="0"/>
+              <a:rPr lang="en-US" altLang="zh-TW"/>
               <a:t>Second level</a:t>
             </a:r>
           </a:p>
           <a:p>
             <a:pPr lvl="2"/>
             <a:r>
-              <a:rPr lang="en-US" altLang="zh-TW" smtClean="0"/>
+              <a:rPr lang="en-US" altLang="zh-TW"/>
               <a:t>Third level</a:t>
             </a:r>
           </a:p>
           <a:p>
             <a:pPr lvl="3"/>
             <a:r>
-              <a:rPr lang="en-US" altLang="zh-TW" smtClean="0"/>
+              <a:rPr lang="en-US" altLang="zh-TW"/>
               <a:t>Fourth level</a:t>
             </a:r>
           </a:p>
           <a:p>
             <a:pPr lvl="4"/>
             <a:r>
-              <a:rPr lang="en-US" altLang="zh-TW" smtClean="0"/>
+              <a:rPr lang="en-US" altLang="zh-TW"/>
               <a:t>Fifth level</a:t>
             </a:r>
             <a:endParaRPr lang="zh-TW" altLang="en-US"/>
@@ -2249,7 +2253,7 @@
           <a:p>
             <a:pPr lvl="0"/>
             <a:r>
-              <a:rPr lang="en-US" altLang="zh-TW" smtClean="0"/>
+              <a:rPr lang="en-US" altLang="zh-TW"/>
               <a:t>Edit Master text styles</a:t>
             </a:r>
           </a:p>
@@ -2305,35 +2309,35 @@
           <a:p>
             <a:pPr lvl="0"/>
             <a:r>
-              <a:rPr lang="en-US" altLang="zh-TW" smtClean="0"/>
+              <a:rPr lang="en-US" altLang="zh-TW"/>
               <a:t>Edit Master text styles</a:t>
             </a:r>
           </a:p>
           <a:p>
             <a:pPr lvl="1"/>
             <a:r>
-              <a:rPr lang="en-US" altLang="zh-TW" smtClean="0"/>
+              <a:rPr lang="en-US" altLang="zh-TW"/>
               <a:t>Second level</a:t>
             </a:r>
           </a:p>
           <a:p>
             <a:pPr lvl="2"/>
             <a:r>
-              <a:rPr lang="en-US" altLang="zh-TW" smtClean="0"/>
+              <a:rPr lang="en-US" altLang="zh-TW"/>
               <a:t>Third level</a:t>
             </a:r>
           </a:p>
           <a:p>
             <a:pPr lvl="3"/>
             <a:r>
-              <a:rPr lang="en-US" altLang="zh-TW" smtClean="0"/>
+              <a:rPr lang="en-US" altLang="zh-TW"/>
               <a:t>Fourth level</a:t>
             </a:r>
           </a:p>
           <a:p>
             <a:pPr lvl="4"/>
             <a:r>
-              <a:rPr lang="en-US" altLang="zh-TW" smtClean="0"/>
+              <a:rPr lang="en-US" altLang="zh-TW"/>
               <a:t>Fifth level</a:t>
             </a:r>
             <a:endParaRPr lang="zh-TW" altLang="en-US"/>
@@ -2456,7 +2460,7 @@
           <a:lstStyle/>
           <a:p>
             <a:r>
-              <a:rPr lang="en-US" altLang="zh-TW" smtClean="0"/>
+              <a:rPr lang="en-US" altLang="zh-TW"/>
               <a:t>Click to edit Master title style</a:t>
             </a:r>
             <a:endParaRPr lang="zh-TW" altLang="en-US"/>
@@ -2688,7 +2692,7 @@
           </a:lstStyle>
           <a:p>
             <a:r>
-              <a:rPr lang="en-US" altLang="zh-TW" smtClean="0"/>
+              <a:rPr lang="en-US" altLang="zh-TW"/>
               <a:t>Click to edit Master title style</a:t>
             </a:r>
             <a:endParaRPr lang="zh-TW" altLang="en-US"/>
@@ -2745,35 +2749,35 @@
           <a:p>
             <a:pPr lvl="0"/>
             <a:r>
-              <a:rPr lang="en-US" altLang="zh-TW" smtClean="0"/>
+              <a:rPr lang="en-US" altLang="zh-TW"/>
               <a:t>Edit Master text styles</a:t>
             </a:r>
           </a:p>
           <a:p>
             <a:pPr lvl="1"/>
             <a:r>
-              <a:rPr lang="en-US" altLang="zh-TW" smtClean="0"/>
+              <a:rPr lang="en-US" altLang="zh-TW"/>
               <a:t>Second level</a:t>
             </a:r>
           </a:p>
           <a:p>
             <a:pPr lvl="2"/>
             <a:r>
-              <a:rPr lang="en-US" altLang="zh-TW" smtClean="0"/>
+              <a:rPr lang="en-US" altLang="zh-TW"/>
               <a:t>Third level</a:t>
             </a:r>
           </a:p>
           <a:p>
             <a:pPr lvl="3"/>
             <a:r>
-              <a:rPr lang="en-US" altLang="zh-TW" smtClean="0"/>
+              <a:rPr lang="en-US" altLang="zh-TW"/>
               <a:t>Fourth level</a:t>
             </a:r>
           </a:p>
           <a:p>
             <a:pPr lvl="4"/>
             <a:r>
-              <a:rPr lang="en-US" altLang="zh-TW" smtClean="0"/>
+              <a:rPr lang="en-US" altLang="zh-TW"/>
               <a:t>Fifth level</a:t>
             </a:r>
             <a:endParaRPr lang="zh-TW" altLang="en-US"/>
@@ -2839,7 +2843,7 @@
           <a:p>
             <a:pPr lvl="0"/>
             <a:r>
-              <a:rPr lang="en-US" altLang="zh-TW" smtClean="0"/>
+              <a:rPr lang="en-US" altLang="zh-TW"/>
               <a:t>Edit Master text styles</a:t>
             </a:r>
           </a:p>
@@ -2970,7 +2974,7 @@
           </a:lstStyle>
           <a:p>
             <a:r>
-              <a:rPr lang="en-US" altLang="zh-TW" smtClean="0"/>
+              <a:rPr lang="en-US" altLang="zh-TW"/>
               <a:t>Click to edit Master title style</a:t>
             </a:r>
             <a:endParaRPr lang="zh-TW" altLang="en-US"/>
@@ -3035,7 +3039,7 @@
           </a:lstStyle>
           <a:p>
             <a:r>
-              <a:rPr lang="en-US" altLang="zh-TW" smtClean="0"/>
+              <a:rPr lang="en-US" altLang="zh-TW"/>
               <a:t>Click icon to add picture</a:t>
             </a:r>
             <a:endParaRPr lang="zh-TW" altLang="en-US"/>
@@ -3101,7 +3105,7 @@
           <a:p>
             <a:pPr lvl="0"/>
             <a:r>
-              <a:rPr lang="en-US" altLang="zh-TW" smtClean="0"/>
+              <a:rPr lang="en-US" altLang="zh-TW"/>
               <a:t>Edit Master text styles</a:t>
             </a:r>
           </a:p>
@@ -3243,10 +3247,9 @@
           <a:lstStyle/>
           <a:p>
             <a:r>
-              <a:rPr lang="zh-TW" altLang="en-US" smtClean="0"/>
+              <a:rPr lang="zh-TW" altLang="en-US"/>
               <a:t>按一下以編輯母片標題樣式</a:t>
             </a:r>
-            <a:endParaRPr lang="zh-TW" altLang="en-US"/>
           </a:p>
         </p:txBody>
       </p:sp>
@@ -3277,38 +3280,37 @@
           <a:p>
             <a:pPr lvl="0"/>
             <a:r>
-              <a:rPr lang="zh-TW" altLang="en-US" smtClean="0"/>
+              <a:rPr lang="zh-TW" altLang="en-US"/>
               <a:t>按一下以編輯母片文字樣式</a:t>
             </a:r>
           </a:p>
           <a:p>
             <a:pPr lvl="1"/>
             <a:r>
-              <a:rPr lang="zh-TW" altLang="en-US" smtClean="0"/>
+              <a:rPr lang="zh-TW" altLang="en-US"/>
               <a:t>第二層</a:t>
             </a:r>
           </a:p>
           <a:p>
             <a:pPr lvl="2"/>
             <a:r>
-              <a:rPr lang="zh-TW" altLang="en-US" smtClean="0"/>
+              <a:rPr lang="zh-TW" altLang="en-US"/>
               <a:t>第三層</a:t>
             </a:r>
           </a:p>
           <a:p>
             <a:pPr lvl="3"/>
             <a:r>
-              <a:rPr lang="zh-TW" altLang="en-US" smtClean="0"/>
+              <a:rPr lang="zh-TW" altLang="en-US"/>
               <a:t>第四層</a:t>
             </a:r>
           </a:p>
           <a:p>
             <a:pPr lvl="4"/>
             <a:r>
-              <a:rPr lang="zh-TW" altLang="en-US" smtClean="0"/>
+              <a:rPr lang="zh-TW" altLang="en-US"/>
               <a:t>第五層</a:t>
             </a:r>
-            <a:endParaRPr lang="zh-TW" altLang="en-US"/>
           </a:p>
         </p:txBody>
       </p:sp>
@@ -3767,7 +3769,7 @@
               <a:t>宣道詩 </a:t>
             </a:r>
             <a:r>
-              <a:rPr lang="en-US" altLang="zh-CN" sz="5333" b="1" u="sng" dirty="0" smtClean="0">
+              <a:rPr lang="en-US" altLang="zh-CN" sz="5333" b="1" u="sng" dirty="0">
                 <a:solidFill>
                   <a:srgbClr val="000066"/>
                 </a:solidFill>
@@ -3783,23 +3785,6 @@
               </a:rPr>
               <a:t>263</a:t>
             </a:r>
-            <a:r>
-              <a:rPr lang="en-US" altLang="zh-CN" sz="7200" b="1" i="1" dirty="0">
-                <a:solidFill>
-                  <a:srgbClr val="660033"/>
-                </a:solidFill>
-                <a:effectLst>
-                  <a:outerShdw blurRad="38100" dist="38100" dir="2700000" algn="tl">
-                    <a:srgbClr val="000000">
-                      <a:alpha val="43137"/>
-                    </a:srgbClr>
-                  </a:outerShdw>
-                </a:effectLst>
-                <a:latin typeface="微軟正黑體" pitchFamily="34" charset="-120"/>
-                <a:ea typeface="微軟正黑體" pitchFamily="34" charset="-120"/>
-              </a:rPr>
-              <a:t/>
-            </a:r>
             <a:br>
               <a:rPr lang="en-US" altLang="zh-CN" sz="7200" b="1" i="1" dirty="0">
                 <a:solidFill>
@@ -3817,7 +3802,7 @@
               </a:rPr>
             </a:br>
             <a:r>
-              <a:rPr lang="zh-CN" altLang="en-US" sz="8000" b="1" dirty="0" smtClean="0">
+              <a:rPr lang="zh-CN" altLang="en-US" sz="8000" b="1" dirty="0">
                 <a:solidFill>
                   <a:srgbClr val="660033"/>
                 </a:solidFill>
@@ -3831,24 +3816,7 @@
                 <a:latin typeface="微軟正黑體" pitchFamily="34" charset="-120"/>
                 <a:ea typeface="微軟正黑體" pitchFamily="34" charset="-120"/>
               </a:rPr>
-              <a:t>聖</a:t>
-            </a:r>
-            <a:r>
-              <a:rPr lang="zh-CN" altLang="en-US" sz="8000" b="1" dirty="0">
-                <a:solidFill>
-                  <a:srgbClr val="660033"/>
-                </a:solidFill>
-                <a:effectLst>
-                  <a:outerShdw blurRad="38100" dist="38100" dir="2700000" algn="tl">
-                    <a:srgbClr val="000000">
-                      <a:alpha val="43137"/>
-                    </a:srgbClr>
-                  </a:outerShdw>
-                </a:effectLst>
-                <a:latin typeface="微軟正黑體" pitchFamily="34" charset="-120"/>
-                <a:ea typeface="微軟正黑體" pitchFamily="34" charset="-120"/>
-              </a:rPr>
-              <a:t>餐</a:t>
+              <a:t>聖餐</a:t>
             </a:r>
             <a:endParaRPr lang="zh-TW" altLang="en-US" sz="8000" b="1" dirty="0">
               <a:solidFill>
@@ -3877,13 +3845,6 @@
   <p:clrMapOvr>
     <a:masterClrMapping/>
   </p:clrMapOvr>
-  <p:timing>
-    <p:tnLst>
-      <p:par>
-        <p:cTn id="1" dur="indefinite" restart="never" nodeType="tmRoot"/>
-      </p:par>
-    </p:tnLst>
-  </p:timing>
 </p:sld>
 </file>
 
@@ -3937,17 +3898,7 @@
                 <a:latin typeface="Microsoft JhengHei" pitchFamily="34" charset="-120"/>
                 <a:ea typeface="Microsoft JhengHei" pitchFamily="34" charset="-120"/>
               </a:rPr>
-              <a:t>受這大苦寶血流</a:t>
-            </a:r>
-            <a:r>
-              <a:rPr lang="zh-CN" altLang="zh-TW" sz="6400" b="1" dirty="0">
-                <a:solidFill>
-                  <a:srgbClr val="660033"/>
-                </a:solidFill>
-                <a:latin typeface="Microsoft JhengHei" pitchFamily="34" charset="-120"/>
-                <a:ea typeface="Microsoft JhengHei" pitchFamily="34" charset="-120"/>
-              </a:rPr>
-              <a:t>出</a:t>
+              <a:t>受這大苦寶血流出</a:t>
             </a:r>
             <a:endParaRPr lang="en-US" altLang="zh-CN" sz="6400" b="1" dirty="0">
               <a:solidFill>
@@ -3969,17 +3920,7 @@
                 <a:latin typeface="Microsoft JhengHei" pitchFamily="34" charset="-120"/>
                 <a:ea typeface="Microsoft JhengHei" pitchFamily="34" charset="-120"/>
               </a:rPr>
-              <a:t>今</a:t>
-            </a:r>
-            <a:r>
-              <a:rPr lang="zh-CN" altLang="zh-TW" sz="6400" b="1" dirty="0">
-                <a:solidFill>
-                  <a:srgbClr val="660033"/>
-                </a:solidFill>
-                <a:latin typeface="Microsoft JhengHei" pitchFamily="34" charset="-120"/>
-                <a:ea typeface="Microsoft JhengHei" pitchFamily="34" charset="-120"/>
-              </a:rPr>
-              <a:t>我無苦可受</a:t>
+              <a:t>今我無苦可受</a:t>
             </a:r>
           </a:p>
         </p:txBody>
@@ -3993,7 +3934,7 @@
         <p:spPr>
           <a:xfrm>
             <a:off x="0" y="5061182"/>
-            <a:ext cx="12192000" cy="830997"/>
+            <a:ext cx="12192000" cy="646331"/>
           </a:xfrm>
           <a:prstGeom prst="rect">
             <a:avLst/>
@@ -4008,41 +3949,50 @@
           <a:p>
             <a:pPr algn="ctr"/>
             <a:r>
-              <a:rPr lang="en-US" sz="4800" b="1" dirty="0">
+              <a:rPr lang="en-US" sz="3600" b="1" dirty="0">
                 <a:solidFill>
                   <a:srgbClr val="660033"/>
                 </a:solidFill>
+                <a:latin typeface="+mn-lt"/>
+                <a:ea typeface="Microsoft JhengHei" panose="020B0604030504040204" pitchFamily="34" charset="-120"/>
               </a:rPr>
-              <a:t>( </a:t>
-            </a:r>
-            <a:r>
-              <a:rPr lang="en-US" sz="4800" b="1" dirty="0" smtClean="0">
+              <a:t>( 3 / 4 )</a:t>
+            </a:r>
+            <a:r>
+              <a:rPr lang="en-US" sz="3200" b="1" dirty="0">
                 <a:solidFill>
                   <a:srgbClr val="660033"/>
                 </a:solidFill>
+                <a:latin typeface="Microsoft JhengHei" panose="020B0604030504040204" pitchFamily="34" charset="-120"/>
+                <a:ea typeface="Microsoft JhengHei" panose="020B0604030504040204" pitchFamily="34" charset="-120"/>
               </a:rPr>
-              <a:t>3 )</a:t>
-            </a:r>
-            <a:r>
-              <a:rPr lang="en-US" sz="4800" b="1" dirty="0">
+              <a:t>( 2</a:t>
+            </a:r>
+            <a:r>
+              <a:rPr lang="zh-CN" altLang="en-US" sz="3200" b="1" dirty="0">
                 <a:solidFill>
                   <a:srgbClr val="660033"/>
                 </a:solidFill>
+                <a:latin typeface="Microsoft JhengHei" panose="020B0604030504040204" pitchFamily="34" charset="-120"/>
+                <a:ea typeface="Microsoft JhengHei" panose="020B0604030504040204" pitchFamily="34" charset="-120"/>
               </a:rPr>
-              <a:t> ( </a:t>
-            </a:r>
-            <a:r>
-              <a:rPr lang="en-US" sz="4800" b="1" dirty="0" smtClean="0">
+              <a:t>次</a:t>
+            </a:r>
+            <a:r>
+              <a:rPr lang="en-US" sz="3200" b="1" dirty="0">
                 <a:solidFill>
                   <a:srgbClr val="660033"/>
                 </a:solidFill>
+                <a:latin typeface="Microsoft JhengHei" panose="020B0604030504040204" pitchFamily="34" charset="-120"/>
+                <a:ea typeface="Microsoft JhengHei" panose="020B0604030504040204" pitchFamily="34" charset="-120"/>
               </a:rPr>
-              <a:t>x2 )</a:t>
-            </a:r>
-            <a:endParaRPr lang="vi-VN" sz="4800" b="1" dirty="0">
+              <a:t> )</a:t>
+            </a:r>
+            <a:endParaRPr lang="vi-VN" sz="3600" b="1" dirty="0">
               <a:solidFill>
                 <a:srgbClr val="660033"/>
               </a:solidFill>
+              <a:ea typeface="Microsoft JhengHei" panose="020B0604030504040204" pitchFamily="34" charset="-120"/>
             </a:endParaRPr>
           </a:p>
         </p:txBody>
@@ -4057,13 +4007,6 @@
   <p:clrMapOvr>
     <a:masterClrMapping/>
   </p:clrMapOvr>
-  <p:timing>
-    <p:tnLst>
-      <p:par>
-        <p:cTn id="1" dur="indefinite" restart="never" nodeType="tmRoot"/>
-      </p:par>
-    </p:tnLst>
-  </p:timing>
 </p:sld>
 </file>
 
@@ -4117,17 +4060,7 @@
                 <a:latin typeface="Microsoft JhengHei" pitchFamily="34" charset="-120"/>
                 <a:ea typeface="Microsoft JhengHei" pitchFamily="34" charset="-120"/>
               </a:rPr>
-              <a:t>我主耶穌為我受</a:t>
-            </a:r>
-            <a:r>
-              <a:rPr lang="zh-CN" altLang="zh-TW" sz="6400" b="1" dirty="0">
-                <a:solidFill>
-                  <a:srgbClr val="660033"/>
-                </a:solidFill>
-                <a:latin typeface="Microsoft JhengHei" pitchFamily="34" charset="-120"/>
-                <a:ea typeface="Microsoft JhengHei" pitchFamily="34" charset="-120"/>
-              </a:rPr>
-              <a:t>死</a:t>
+              <a:t>我主耶穌為我受死</a:t>
             </a:r>
             <a:endParaRPr lang="en-US" altLang="zh-CN" sz="6400" b="1" dirty="0">
               <a:solidFill>
@@ -4149,17 +4082,7 @@
                 <a:latin typeface="Microsoft JhengHei" pitchFamily="34" charset="-120"/>
                 <a:ea typeface="Microsoft JhengHei" pitchFamily="34" charset="-120"/>
               </a:rPr>
-              <a:t>我</a:t>
-            </a:r>
-            <a:r>
-              <a:rPr lang="zh-CN" altLang="zh-TW" sz="6400" b="1" dirty="0">
-                <a:solidFill>
-                  <a:srgbClr val="660033"/>
-                </a:solidFill>
-                <a:latin typeface="Microsoft JhengHei" pitchFamily="34" charset="-120"/>
-                <a:ea typeface="Microsoft JhengHei" pitchFamily="34" charset="-120"/>
-              </a:rPr>
-              <a:t>也和主同死</a:t>
+              <a:t>我也和主同死</a:t>
             </a:r>
           </a:p>
         </p:txBody>
@@ -4173,7 +4096,7 @@
         <p:spPr>
           <a:xfrm>
             <a:off x="0" y="5061182"/>
-            <a:ext cx="12192000" cy="830997"/>
+            <a:ext cx="12192000" cy="584775"/>
           </a:xfrm>
           <a:prstGeom prst="rect">
             <a:avLst/>
@@ -4188,33 +4111,19 @@
           <a:p>
             <a:pPr algn="ctr"/>
             <a:r>
-              <a:rPr lang="en-US" sz="4800" b="1" dirty="0">
+              <a:rPr lang="en-US" sz="3200" b="1" dirty="0">
                 <a:solidFill>
                   <a:srgbClr val="660033"/>
                 </a:solidFill>
+                <a:latin typeface="+mn-lt"/>
               </a:rPr>
-              <a:t>( </a:t>
-            </a:r>
-            <a:r>
-              <a:rPr lang="en-US" sz="4800" b="1" dirty="0" smtClean="0">
-                <a:solidFill>
-                  <a:srgbClr val="660033"/>
-                </a:solidFill>
-              </a:rPr>
-              <a:t>4 </a:t>
-            </a:r>
-            <a:r>
-              <a:rPr lang="en-US" sz="4800" b="1" dirty="0">
-                <a:solidFill>
-                  <a:srgbClr val="660033"/>
-                </a:solidFill>
-              </a:rPr>
-              <a:t>)</a:t>
-            </a:r>
-            <a:endParaRPr lang="vi-VN" sz="4800" b="1" dirty="0">
+              <a:t>( 4 / 4 )</a:t>
+            </a:r>
+            <a:endParaRPr lang="vi-VN" sz="3200" b="1" dirty="0">
               <a:solidFill>
                 <a:srgbClr val="660033"/>
               </a:solidFill>
+              <a:latin typeface="+mn-lt"/>
             </a:endParaRPr>
           </a:p>
         </p:txBody>
@@ -4229,13 +4138,6 @@
   <p:clrMapOvr>
     <a:masterClrMapping/>
   </p:clrMapOvr>
-  <p:timing>
-    <p:tnLst>
-      <p:par>
-        <p:cTn id="1" dur="indefinite" restart="never" nodeType="tmRoot"/>
-      </p:par>
-    </p:tnLst>
-  </p:timing>
 </p:sld>
 </file>
 
@@ -4289,17 +4191,7 @@
                 <a:latin typeface="Microsoft JhengHei" pitchFamily="34" charset="-120"/>
                 <a:ea typeface="Microsoft JhengHei" pitchFamily="34" charset="-120"/>
               </a:rPr>
-              <a:t>主已復活為我後</a:t>
-            </a:r>
-            <a:r>
-              <a:rPr lang="zh-CN" altLang="zh-TW" sz="6400" b="1" dirty="0">
-                <a:solidFill>
-                  <a:srgbClr val="660033"/>
-                </a:solidFill>
-                <a:latin typeface="Microsoft JhengHei" pitchFamily="34" charset="-120"/>
-                <a:ea typeface="Microsoft JhengHei" pitchFamily="34" charset="-120"/>
-              </a:rPr>
-              <a:t>嗣</a:t>
+              <a:t>主已復活為我後嗣</a:t>
             </a:r>
             <a:endParaRPr lang="en-US" altLang="zh-CN" sz="6400" b="1" dirty="0">
               <a:solidFill>
@@ -4321,17 +4213,7 @@
                 <a:latin typeface="Microsoft JhengHei" pitchFamily="34" charset="-120"/>
                 <a:ea typeface="Microsoft JhengHei" pitchFamily="34" charset="-120"/>
               </a:rPr>
-              <a:t>我</a:t>
-            </a:r>
-            <a:r>
-              <a:rPr lang="zh-CN" altLang="zh-TW" sz="6400" b="1" dirty="0">
-                <a:solidFill>
-                  <a:srgbClr val="660033"/>
-                </a:solidFill>
-                <a:latin typeface="Microsoft JhengHei" pitchFamily="34" charset="-120"/>
-                <a:ea typeface="Microsoft JhengHei" pitchFamily="34" charset="-120"/>
-              </a:rPr>
-              <a:t>同主作後嗣</a:t>
+              <a:t>我同主作後嗣</a:t>
             </a:r>
           </a:p>
         </p:txBody>
@@ -4345,7 +4227,7 @@
         <p:spPr>
           <a:xfrm>
             <a:off x="0" y="5061182"/>
-            <a:ext cx="12192000" cy="830997"/>
+            <a:ext cx="12192000" cy="584775"/>
           </a:xfrm>
           <a:prstGeom prst="rect">
             <a:avLst/>
@@ -4360,33 +4242,19 @@
           <a:p>
             <a:pPr algn="ctr"/>
             <a:r>
-              <a:rPr lang="en-US" sz="4800" b="1" dirty="0">
+              <a:rPr lang="en-US" sz="3200" b="1" dirty="0">
                 <a:solidFill>
                   <a:srgbClr val="660033"/>
                 </a:solidFill>
+                <a:latin typeface="+mn-lt"/>
               </a:rPr>
-              <a:t>( </a:t>
-            </a:r>
-            <a:r>
-              <a:rPr lang="en-US" sz="4800" b="1" dirty="0" smtClean="0">
-                <a:solidFill>
-                  <a:srgbClr val="660033"/>
-                </a:solidFill>
-              </a:rPr>
-              <a:t>4 </a:t>
-            </a:r>
-            <a:r>
-              <a:rPr lang="en-US" sz="4800" b="1" dirty="0">
-                <a:solidFill>
-                  <a:srgbClr val="660033"/>
-                </a:solidFill>
-              </a:rPr>
-              <a:t>)</a:t>
-            </a:r>
-            <a:endParaRPr lang="vi-VN" sz="4800" b="1" dirty="0">
+              <a:t>( 4 / 4 )</a:t>
+            </a:r>
+            <a:endParaRPr lang="vi-VN" sz="3200" b="1" dirty="0">
               <a:solidFill>
                 <a:srgbClr val="660033"/>
               </a:solidFill>
+              <a:latin typeface="+mn-lt"/>
             </a:endParaRPr>
           </a:p>
         </p:txBody>
@@ -4401,13 +4269,6 @@
   <p:clrMapOvr>
     <a:masterClrMapping/>
   </p:clrMapOvr>
-  <p:timing>
-    <p:tnLst>
-      <p:par>
-        <p:cTn id="1" dur="indefinite" restart="never" nodeType="tmRoot"/>
-      </p:par>
-    </p:tnLst>
-  </p:timing>
 </p:sld>
 </file>
 
@@ -4461,17 +4322,7 @@
                 <a:latin typeface="Microsoft JhengHei" pitchFamily="34" charset="-120"/>
                 <a:ea typeface="Microsoft JhengHei" pitchFamily="34" charset="-120"/>
               </a:rPr>
-              <a:t>將得升天永見主</a:t>
-            </a:r>
-            <a:r>
-              <a:rPr lang="zh-CN" altLang="zh-TW" sz="6400" b="1" dirty="0">
-                <a:solidFill>
-                  <a:srgbClr val="660033"/>
-                </a:solidFill>
-                <a:latin typeface="Microsoft JhengHei" pitchFamily="34" charset="-120"/>
-                <a:ea typeface="Microsoft JhengHei" pitchFamily="34" charset="-120"/>
-              </a:rPr>
-              <a:t>面</a:t>
+              <a:t>將得升天永見主面</a:t>
             </a:r>
             <a:endParaRPr lang="en-US" altLang="zh-CN" sz="6400" b="1" dirty="0">
               <a:solidFill>
@@ -4493,17 +4344,7 @@
                 <a:latin typeface="Microsoft JhengHei" pitchFamily="34" charset="-120"/>
                 <a:ea typeface="Microsoft JhengHei" pitchFamily="34" charset="-120"/>
               </a:rPr>
-              <a:t>同</a:t>
-            </a:r>
-            <a:r>
-              <a:rPr lang="zh-CN" altLang="zh-TW" sz="6400" b="1" dirty="0">
-                <a:solidFill>
-                  <a:srgbClr val="660033"/>
-                </a:solidFill>
-                <a:latin typeface="Microsoft JhengHei" pitchFamily="34" charset="-120"/>
-                <a:ea typeface="Microsoft JhengHei" pitchFamily="34" charset="-120"/>
-              </a:rPr>
-              <a:t>主享福萬年</a:t>
+              <a:t>同主享福萬年</a:t>
             </a:r>
           </a:p>
         </p:txBody>
@@ -4517,7 +4358,7 @@
         <p:spPr>
           <a:xfrm>
             <a:off x="0" y="5061182"/>
-            <a:ext cx="12192000" cy="830997"/>
+            <a:ext cx="12192000" cy="646331"/>
           </a:xfrm>
           <a:prstGeom prst="rect">
             <a:avLst/>
@@ -4532,41 +4373,50 @@
           <a:p>
             <a:pPr algn="ctr"/>
             <a:r>
-              <a:rPr lang="en-US" sz="4800" b="1" dirty="0">
+              <a:rPr lang="en-US" sz="3600" b="1" dirty="0">
                 <a:solidFill>
                   <a:srgbClr val="660033"/>
                 </a:solidFill>
+                <a:latin typeface="+mn-lt"/>
+                <a:ea typeface="Microsoft JhengHei" panose="020B0604030504040204" pitchFamily="34" charset="-120"/>
               </a:rPr>
-              <a:t>( </a:t>
-            </a:r>
-            <a:r>
-              <a:rPr lang="en-US" sz="4800" b="1" dirty="0" smtClean="0">
+              <a:t>( 4 / 4 )</a:t>
+            </a:r>
+            <a:r>
+              <a:rPr lang="en-US" sz="3200" b="1" dirty="0">
                 <a:solidFill>
                   <a:srgbClr val="660033"/>
                 </a:solidFill>
+                <a:latin typeface="Microsoft JhengHei" panose="020B0604030504040204" pitchFamily="34" charset="-120"/>
+                <a:ea typeface="Microsoft JhengHei" panose="020B0604030504040204" pitchFamily="34" charset="-120"/>
               </a:rPr>
-              <a:t>4 )</a:t>
-            </a:r>
-            <a:r>
-              <a:rPr lang="en-US" sz="4800" b="1" dirty="0">
+              <a:t>( 2</a:t>
+            </a:r>
+            <a:r>
+              <a:rPr lang="zh-CN" altLang="en-US" sz="3200" b="1" dirty="0">
                 <a:solidFill>
                   <a:srgbClr val="660033"/>
                 </a:solidFill>
+                <a:latin typeface="Microsoft JhengHei" panose="020B0604030504040204" pitchFamily="34" charset="-120"/>
+                <a:ea typeface="Microsoft JhengHei" panose="020B0604030504040204" pitchFamily="34" charset="-120"/>
               </a:rPr>
-              <a:t> ( </a:t>
-            </a:r>
-            <a:r>
-              <a:rPr lang="en-US" sz="4800" b="1" dirty="0" smtClean="0">
+              <a:t>次</a:t>
+            </a:r>
+            <a:r>
+              <a:rPr lang="en-US" sz="3200" b="1" dirty="0">
                 <a:solidFill>
                   <a:srgbClr val="660033"/>
                 </a:solidFill>
+                <a:latin typeface="Microsoft JhengHei" panose="020B0604030504040204" pitchFamily="34" charset="-120"/>
+                <a:ea typeface="Microsoft JhengHei" panose="020B0604030504040204" pitchFamily="34" charset="-120"/>
               </a:rPr>
-              <a:t>x2 )</a:t>
-            </a:r>
-            <a:endParaRPr lang="vi-VN" sz="4800" b="1" dirty="0">
+              <a:t> )</a:t>
+            </a:r>
+            <a:endParaRPr lang="vi-VN" sz="3600" b="1" dirty="0">
               <a:solidFill>
                 <a:srgbClr val="660033"/>
               </a:solidFill>
+              <a:ea typeface="Microsoft JhengHei" panose="020B0604030504040204" pitchFamily="34" charset="-120"/>
             </a:endParaRPr>
           </a:p>
         </p:txBody>
@@ -4581,13 +4431,6 @@
   <p:clrMapOvr>
     <a:masterClrMapping/>
   </p:clrMapOvr>
-  <p:timing>
-    <p:tnLst>
-      <p:par>
-        <p:cTn id="1" dur="indefinite" restart="never" nodeType="tmRoot"/>
-      </p:par>
-    </p:tnLst>
-  </p:timing>
 </p:sld>
 </file>
 
@@ -4634,34 +4477,14 @@
               <a:buNone/>
             </a:pPr>
             <a:r>
-              <a:rPr lang="zh-CN" altLang="zh-TW" sz="6400" b="1" dirty="0" smtClean="0">
+              <a:rPr lang="zh-CN" altLang="zh-TW" sz="6400" b="1" dirty="0">
                 <a:solidFill>
                   <a:srgbClr val="660033"/>
                 </a:solidFill>
                 <a:latin typeface="Microsoft JhengHei" pitchFamily="34" charset="-120"/>
                 <a:ea typeface="Microsoft JhengHei" pitchFamily="34" charset="-120"/>
               </a:rPr>
-              <a:t>哀</a:t>
-            </a:r>
-            <a:r>
-              <a:rPr lang="zh-CN" altLang="zh-TW" sz="6400" b="1" dirty="0">
-                <a:solidFill>
-                  <a:srgbClr val="660033"/>
-                </a:solidFill>
-                <a:latin typeface="Microsoft JhengHei" pitchFamily="34" charset="-120"/>
-                <a:ea typeface="Microsoft JhengHei" pitchFamily="34" charset="-120"/>
-              </a:rPr>
-              <a:t>哉基督受苦何</a:t>
-            </a:r>
-            <a:r>
-              <a:rPr lang="zh-CN" altLang="zh-TW" sz="6400" b="1" dirty="0" smtClean="0">
-                <a:solidFill>
-                  <a:srgbClr val="660033"/>
-                </a:solidFill>
-                <a:latin typeface="Microsoft JhengHei" pitchFamily="34" charset="-120"/>
-                <a:ea typeface="Microsoft JhengHei" pitchFamily="34" charset="-120"/>
-              </a:rPr>
-              <a:t>深</a:t>
+              <a:t>哀哉基督受苦何深</a:t>
             </a:r>
             <a:endParaRPr lang="en-US" altLang="zh-CN" sz="6400" b="1" dirty="0">
               <a:solidFill>
@@ -4676,42 +4499,15 @@
               <a:buNone/>
             </a:pPr>
             <a:r>
-              <a:rPr lang="zh-CN" altLang="zh-TW" sz="6400" b="1" dirty="0" smtClean="0">
+              <a:rPr lang="zh-CN" altLang="zh-TW" sz="6400" b="1" dirty="0">
                 <a:solidFill>
                   <a:srgbClr val="660033"/>
                 </a:solidFill>
                 <a:latin typeface="Microsoft JhengHei" pitchFamily="34" charset="-120"/>
                 <a:ea typeface="Microsoft JhengHei" pitchFamily="34" charset="-120"/>
               </a:rPr>
-              <a:t>替</a:t>
-            </a:r>
-            <a:r>
-              <a:rPr lang="zh-CN" altLang="zh-TW" sz="6400" b="1" dirty="0">
-                <a:solidFill>
-                  <a:srgbClr val="660033"/>
-                </a:solidFill>
-                <a:latin typeface="Microsoft JhengHei" pitchFamily="34" charset="-120"/>
-                <a:ea typeface="Microsoft JhengHei" pitchFamily="34" charset="-120"/>
-              </a:rPr>
-              <a:t>我脫離重</a:t>
-            </a:r>
-            <a:r>
-              <a:rPr lang="zh-CN" altLang="zh-TW" sz="6400" b="1" dirty="0" smtClean="0">
-                <a:solidFill>
-                  <a:srgbClr val="660033"/>
-                </a:solidFill>
-                <a:latin typeface="Microsoft JhengHei" pitchFamily="34" charset="-120"/>
-                <a:ea typeface="Microsoft JhengHei" pitchFamily="34" charset="-120"/>
-              </a:rPr>
-              <a:t>擔</a:t>
-            </a:r>
-            <a:endParaRPr lang="zh-CN" altLang="zh-TW" sz="6400" b="1" dirty="0">
-              <a:solidFill>
-                <a:srgbClr val="660033"/>
-              </a:solidFill>
-              <a:latin typeface="Microsoft JhengHei" pitchFamily="34" charset="-120"/>
-              <a:ea typeface="Microsoft JhengHei" pitchFamily="34" charset="-120"/>
-            </a:endParaRPr>
+              <a:t>替我脫離重擔</a:t>
+            </a:r>
           </a:p>
         </p:txBody>
       </p:sp>
@@ -4724,7 +4520,7 @@
         <p:spPr>
           <a:xfrm>
             <a:off x="0" y="5061182"/>
-            <a:ext cx="12192000" cy="830997"/>
+            <a:ext cx="12192000" cy="584775"/>
           </a:xfrm>
           <a:prstGeom prst="rect">
             <a:avLst/>
@@ -4739,17 +4535,19 @@
           <a:p>
             <a:pPr algn="ctr"/>
             <a:r>
-              <a:rPr lang="en-US" sz="4800" b="1" dirty="0">
+              <a:rPr lang="en-US" sz="3200" b="1" dirty="0">
                 <a:solidFill>
                   <a:srgbClr val="660033"/>
                 </a:solidFill>
+                <a:latin typeface="+mn-lt"/>
               </a:rPr>
-              <a:t>( 1 )</a:t>
-            </a:r>
-            <a:endParaRPr lang="vi-VN" sz="4800" b="1" dirty="0">
+              <a:t>( 1 / 4 )</a:t>
+            </a:r>
+            <a:endParaRPr lang="vi-VN" sz="3200" b="1" dirty="0">
               <a:solidFill>
                 <a:srgbClr val="660033"/>
               </a:solidFill>
+              <a:latin typeface="+mn-lt"/>
             </a:endParaRPr>
           </a:p>
         </p:txBody>
@@ -4764,13 +4562,6 @@
   <p:clrMapOvr>
     <a:masterClrMapping/>
   </p:clrMapOvr>
-  <p:timing>
-    <p:tnLst>
-      <p:par>
-        <p:cTn id="1" dur="indefinite" restart="never" nodeType="tmRoot"/>
-      </p:par>
-    </p:tnLst>
-  </p:timing>
 </p:sld>
 </file>
 
@@ -4817,34 +4608,14 @@
               <a:buNone/>
             </a:pPr>
             <a:r>
-              <a:rPr lang="zh-CN" altLang="zh-TW" sz="6400" b="1" dirty="0" smtClean="0">
+              <a:rPr lang="zh-CN" altLang="zh-TW" sz="6400" b="1" dirty="0">
                 <a:solidFill>
                   <a:srgbClr val="660033"/>
                 </a:solidFill>
                 <a:latin typeface="Microsoft JhengHei" pitchFamily="34" charset="-120"/>
                 <a:ea typeface="Microsoft JhengHei" pitchFamily="34" charset="-120"/>
               </a:rPr>
-              <a:t>主</a:t>
-            </a:r>
-            <a:r>
-              <a:rPr lang="zh-CN" altLang="zh-TW" sz="6400" b="1" dirty="0">
-                <a:solidFill>
-                  <a:srgbClr val="660033"/>
-                </a:solidFill>
-                <a:latin typeface="Microsoft JhengHei" pitchFamily="34" charset="-120"/>
-                <a:ea typeface="Microsoft JhengHei" pitchFamily="34" charset="-120"/>
-              </a:rPr>
-              <a:t>替罪人獻上己</a:t>
-            </a:r>
-            <a:r>
-              <a:rPr lang="zh-CN" altLang="zh-TW" sz="6400" b="1" dirty="0" smtClean="0">
-                <a:solidFill>
-                  <a:srgbClr val="660033"/>
-                </a:solidFill>
-                <a:latin typeface="Microsoft JhengHei" pitchFamily="34" charset="-120"/>
-                <a:ea typeface="Microsoft JhengHei" pitchFamily="34" charset="-120"/>
-              </a:rPr>
-              <a:t>身</a:t>
+              <a:t>主替罪人獻上己身</a:t>
             </a:r>
             <a:endParaRPr lang="en-US" altLang="zh-CN" sz="6400" b="1" dirty="0">
               <a:solidFill>
@@ -4859,24 +4630,14 @@
               <a:buNone/>
             </a:pPr>
             <a:r>
-              <a:rPr lang="zh-CN" altLang="zh-TW" sz="6400" b="1" dirty="0" smtClean="0">
+              <a:rPr lang="zh-CN" altLang="zh-TW" sz="6400" b="1" dirty="0">
                 <a:solidFill>
                   <a:srgbClr val="660033"/>
                 </a:solidFill>
                 <a:latin typeface="Microsoft JhengHei" pitchFamily="34" charset="-120"/>
                 <a:ea typeface="Microsoft JhengHei" pitchFamily="34" charset="-120"/>
               </a:rPr>
-              <a:t>替</a:t>
-            </a:r>
-            <a:r>
-              <a:rPr lang="zh-CN" altLang="zh-TW" sz="6400" b="1" dirty="0">
-                <a:solidFill>
-                  <a:srgbClr val="660033"/>
-                </a:solidFill>
-                <a:latin typeface="Microsoft JhengHei" pitchFamily="34" charset="-120"/>
-                <a:ea typeface="Microsoft JhengHei" pitchFamily="34" charset="-120"/>
-              </a:rPr>
-              <a:t>我受苦受難</a:t>
+              <a:t>替我受苦受難</a:t>
             </a:r>
             <a:endParaRPr lang="en-US" altLang="zh-CN" sz="6400" b="1" dirty="0">
               <a:solidFill>
@@ -4897,7 +4658,7 @@
         <p:spPr>
           <a:xfrm>
             <a:off x="0" y="5061182"/>
-            <a:ext cx="12192000" cy="830997"/>
+            <a:ext cx="12192000" cy="584775"/>
           </a:xfrm>
           <a:prstGeom prst="rect">
             <a:avLst/>
@@ -4912,17 +4673,19 @@
           <a:p>
             <a:pPr algn="ctr"/>
             <a:r>
-              <a:rPr lang="en-US" sz="4800" b="1" dirty="0">
+              <a:rPr lang="en-US" sz="3200" b="1" dirty="0">
                 <a:solidFill>
                   <a:srgbClr val="660033"/>
                 </a:solidFill>
+                <a:latin typeface="+mn-lt"/>
               </a:rPr>
-              <a:t>( 1 )</a:t>
-            </a:r>
-            <a:endParaRPr lang="vi-VN" sz="4800" b="1" dirty="0">
+              <a:t>( 1 / 4 )</a:t>
+            </a:r>
+            <a:endParaRPr lang="vi-VN" sz="3200" b="1" dirty="0">
               <a:solidFill>
                 <a:srgbClr val="660033"/>
               </a:solidFill>
+              <a:latin typeface="+mn-lt"/>
             </a:endParaRPr>
           </a:p>
         </p:txBody>
@@ -4937,13 +4700,6 @@
   <p:clrMapOvr>
     <a:masterClrMapping/>
   </p:clrMapOvr>
-  <p:timing>
-    <p:tnLst>
-      <p:par>
-        <p:cTn id="1" dur="indefinite" restart="never" nodeType="tmRoot"/>
-      </p:par>
-    </p:tnLst>
-  </p:timing>
 </p:sld>
 </file>
 
@@ -4997,17 +4753,7 @@
                 <a:latin typeface="Microsoft JhengHei" pitchFamily="34" charset="-120"/>
                 <a:ea typeface="Microsoft JhengHei" pitchFamily="34" charset="-120"/>
               </a:rPr>
-              <a:t>成為犧牲甘入死</a:t>
-            </a:r>
-            <a:r>
-              <a:rPr lang="zh-CN" altLang="zh-TW" sz="6400" b="1" dirty="0">
-                <a:solidFill>
-                  <a:srgbClr val="660033"/>
-                </a:solidFill>
-                <a:latin typeface="Microsoft JhengHei" pitchFamily="34" charset="-120"/>
-                <a:ea typeface="Microsoft JhengHei" pitchFamily="34" charset="-120"/>
-              </a:rPr>
-              <a:t>門</a:t>
+              <a:t>成為犧牲甘入死門</a:t>
             </a:r>
             <a:endParaRPr lang="en-US" altLang="zh-CN" sz="6400" b="1" dirty="0">
               <a:solidFill>
@@ -5029,17 +4775,7 @@
                 <a:latin typeface="Microsoft JhengHei" pitchFamily="34" charset="-120"/>
                 <a:ea typeface="Microsoft JhengHei" pitchFamily="34" charset="-120"/>
               </a:rPr>
-              <a:t>今</a:t>
-            </a:r>
-            <a:r>
-              <a:rPr lang="zh-CN" altLang="zh-TW" sz="6400" b="1" dirty="0">
-                <a:solidFill>
-                  <a:srgbClr val="660033"/>
-                </a:solidFill>
-                <a:latin typeface="Microsoft JhengHei" pitchFamily="34" charset="-120"/>
-                <a:ea typeface="Microsoft JhengHei" pitchFamily="34" charset="-120"/>
-              </a:rPr>
-              <a:t>我無有罪擔</a:t>
+              <a:t>今我無有罪擔</a:t>
             </a:r>
           </a:p>
         </p:txBody>
@@ -5053,7 +4789,7 @@
         <p:spPr>
           <a:xfrm>
             <a:off x="0" y="5061182"/>
-            <a:ext cx="12192000" cy="830997"/>
+            <a:ext cx="12192000" cy="584775"/>
           </a:xfrm>
           <a:prstGeom prst="rect">
             <a:avLst/>
@@ -5068,41 +4804,50 @@
           <a:p>
             <a:pPr algn="ctr"/>
             <a:r>
-              <a:rPr lang="en-US" sz="4800" b="1" dirty="0">
+              <a:rPr lang="en-US" sz="3200" b="1" dirty="0">
                 <a:solidFill>
                   <a:srgbClr val="660033"/>
                 </a:solidFill>
+                <a:latin typeface="+mn-lt"/>
+                <a:ea typeface="Microsoft JhengHei" panose="020B0604030504040204" pitchFamily="34" charset="-120"/>
               </a:rPr>
-              <a:t>( 1 </a:t>
-            </a:r>
-            <a:r>
-              <a:rPr lang="en-US" sz="4800" b="1" dirty="0" smtClean="0">
+              <a:t>( 1 / 4 )</a:t>
+            </a:r>
+            <a:r>
+              <a:rPr lang="en-US" sz="2800" b="1" dirty="0">
                 <a:solidFill>
                   <a:srgbClr val="660033"/>
                 </a:solidFill>
+                <a:latin typeface="Microsoft JhengHei" panose="020B0604030504040204" pitchFamily="34" charset="-120"/>
+                <a:ea typeface="Microsoft JhengHei" panose="020B0604030504040204" pitchFamily="34" charset="-120"/>
               </a:rPr>
-              <a:t>)</a:t>
-            </a:r>
-            <a:r>
-              <a:rPr lang="en-US" sz="4800" b="1" dirty="0">
+              <a:t>( 2</a:t>
+            </a:r>
+            <a:r>
+              <a:rPr lang="zh-CN" altLang="en-US" sz="2800" b="1" dirty="0">
                 <a:solidFill>
                   <a:srgbClr val="660033"/>
                 </a:solidFill>
+                <a:latin typeface="Microsoft JhengHei" panose="020B0604030504040204" pitchFamily="34" charset="-120"/>
+                <a:ea typeface="Microsoft JhengHei" panose="020B0604030504040204" pitchFamily="34" charset="-120"/>
               </a:rPr>
-              <a:t> ( </a:t>
-            </a:r>
-            <a:r>
-              <a:rPr lang="en-US" sz="4800" b="1" dirty="0" smtClean="0">
+              <a:t>次</a:t>
+            </a:r>
+            <a:r>
+              <a:rPr lang="en-US" sz="2800" b="1" dirty="0">
                 <a:solidFill>
                   <a:srgbClr val="660033"/>
                 </a:solidFill>
+                <a:latin typeface="Microsoft JhengHei" panose="020B0604030504040204" pitchFamily="34" charset="-120"/>
+                <a:ea typeface="Microsoft JhengHei" panose="020B0604030504040204" pitchFamily="34" charset="-120"/>
               </a:rPr>
-              <a:t>x2 )</a:t>
-            </a:r>
-            <a:endParaRPr lang="vi-VN" sz="4800" b="1" dirty="0">
+              <a:t> )</a:t>
+            </a:r>
+            <a:endParaRPr lang="vi-VN" sz="3200" b="1" dirty="0">
               <a:solidFill>
                 <a:srgbClr val="660033"/>
               </a:solidFill>
+              <a:ea typeface="Microsoft JhengHei" panose="020B0604030504040204" pitchFamily="34" charset="-120"/>
             </a:endParaRPr>
           </a:p>
         </p:txBody>
@@ -5117,13 +4862,6 @@
   <p:clrMapOvr>
     <a:masterClrMapping/>
   </p:clrMapOvr>
-  <p:timing>
-    <p:tnLst>
-      <p:par>
-        <p:cTn id="1" dur="indefinite" restart="never" nodeType="tmRoot"/>
-      </p:par>
-    </p:tnLst>
-  </p:timing>
 </p:sld>
 </file>
 
@@ -5177,17 +4915,7 @@
                 <a:latin typeface="Microsoft JhengHei" pitchFamily="34" charset="-120"/>
                 <a:ea typeface="Microsoft JhengHei" pitchFamily="34" charset="-120"/>
               </a:rPr>
-              <a:t>我等苦杯盛滿死</a:t>
-            </a:r>
-            <a:r>
-              <a:rPr lang="zh-CN" altLang="zh-TW" sz="6400" b="1" dirty="0">
-                <a:solidFill>
-                  <a:srgbClr val="660033"/>
-                </a:solidFill>
-                <a:latin typeface="Microsoft JhengHei" pitchFamily="34" charset="-120"/>
-                <a:ea typeface="Microsoft JhengHei" pitchFamily="34" charset="-120"/>
-              </a:rPr>
-              <a:t>亡</a:t>
+              <a:t>我等苦杯盛滿死亡</a:t>
             </a:r>
             <a:endParaRPr lang="en-US" altLang="zh-CN" sz="6400" b="1" dirty="0">
               <a:solidFill>
@@ -5209,17 +4937,7 @@
                 <a:latin typeface="Microsoft JhengHei" pitchFamily="34" charset="-120"/>
                 <a:ea typeface="Microsoft JhengHei" pitchFamily="34" charset="-120"/>
               </a:rPr>
-              <a:t>救</a:t>
-            </a:r>
-            <a:r>
-              <a:rPr lang="zh-CN" altLang="zh-TW" sz="6400" b="1" dirty="0">
-                <a:solidFill>
-                  <a:srgbClr val="660033"/>
-                </a:solidFill>
-                <a:latin typeface="Microsoft JhengHei" pitchFamily="34" charset="-120"/>
-                <a:ea typeface="Microsoft JhengHei" pitchFamily="34" charset="-120"/>
-              </a:rPr>
-              <a:t>主曾替我喝</a:t>
+              <a:t>救主曾替我喝</a:t>
             </a:r>
           </a:p>
         </p:txBody>
@@ -5233,7 +4951,7 @@
         <p:spPr>
           <a:xfrm>
             <a:off x="0" y="5061182"/>
-            <a:ext cx="12192000" cy="830997"/>
+            <a:ext cx="12192000" cy="584775"/>
           </a:xfrm>
           <a:prstGeom prst="rect">
             <a:avLst/>
@@ -5248,33 +4966,19 @@
           <a:p>
             <a:pPr algn="ctr"/>
             <a:r>
-              <a:rPr lang="en-US" sz="4800" b="1" dirty="0">
+              <a:rPr lang="en-US" sz="3200" b="1" dirty="0">
                 <a:solidFill>
                   <a:srgbClr val="660033"/>
                 </a:solidFill>
+                <a:latin typeface="+mn-lt"/>
               </a:rPr>
-              <a:t>( </a:t>
-            </a:r>
-            <a:r>
-              <a:rPr lang="en-US" sz="4800" b="1" dirty="0" smtClean="0">
-                <a:solidFill>
-                  <a:srgbClr val="660033"/>
-                </a:solidFill>
-              </a:rPr>
-              <a:t>2 </a:t>
-            </a:r>
-            <a:r>
-              <a:rPr lang="en-US" sz="4800" b="1" dirty="0">
-                <a:solidFill>
-                  <a:srgbClr val="660033"/>
-                </a:solidFill>
-              </a:rPr>
-              <a:t>)</a:t>
-            </a:r>
-            <a:endParaRPr lang="vi-VN" sz="4800" b="1" dirty="0">
+              <a:t>( 2 / 4 )</a:t>
+            </a:r>
+            <a:endParaRPr lang="vi-VN" sz="3200" b="1" dirty="0">
               <a:solidFill>
                 <a:srgbClr val="660033"/>
               </a:solidFill>
+              <a:latin typeface="+mn-lt"/>
             </a:endParaRPr>
           </a:p>
         </p:txBody>
@@ -5289,13 +4993,6 @@
   <p:clrMapOvr>
     <a:masterClrMapping/>
   </p:clrMapOvr>
-  <p:timing>
-    <p:tnLst>
-      <p:par>
-        <p:cTn id="1" dur="indefinite" restart="never" nodeType="tmRoot"/>
-      </p:par>
-    </p:tnLst>
-  </p:timing>
 </p:sld>
 </file>
 
@@ -5349,17 +5046,7 @@
                 <a:latin typeface="Microsoft JhengHei" pitchFamily="34" charset="-120"/>
                 <a:ea typeface="Microsoft JhengHei" pitchFamily="34" charset="-120"/>
               </a:rPr>
-              <a:t>哀哉苦杯主替我</a:t>
-            </a:r>
-            <a:r>
-              <a:rPr lang="zh-CN" altLang="zh-TW" sz="6400" b="1" dirty="0">
-                <a:solidFill>
-                  <a:srgbClr val="660033"/>
-                </a:solidFill>
-                <a:latin typeface="Microsoft JhengHei" pitchFamily="34" charset="-120"/>
-                <a:ea typeface="Microsoft JhengHei" pitchFamily="34" charset="-120"/>
-              </a:rPr>
-              <a:t>嘗</a:t>
+              <a:t>哀哉苦杯主替我嘗</a:t>
             </a:r>
             <a:endParaRPr lang="en-US" altLang="zh-CN" sz="6400" b="1" dirty="0">
               <a:solidFill>
@@ -5381,17 +5068,7 @@
                 <a:latin typeface="Microsoft JhengHei" pitchFamily="34" charset="-120"/>
                 <a:ea typeface="Microsoft JhengHei" pitchFamily="34" charset="-120"/>
               </a:rPr>
-              <a:t>只</a:t>
-            </a:r>
-            <a:r>
-              <a:rPr lang="zh-CN" altLang="zh-TW" sz="6400" b="1" dirty="0">
-                <a:solidFill>
-                  <a:srgbClr val="660033"/>
-                </a:solidFill>
-                <a:latin typeface="Microsoft JhengHei" pitchFamily="34" charset="-120"/>
-                <a:ea typeface="Microsoft JhengHei" pitchFamily="34" charset="-120"/>
-              </a:rPr>
-              <a:t>留空杯給我</a:t>
+              <a:t>只留空杯給我</a:t>
             </a:r>
             <a:endParaRPr lang="en-US" altLang="zh-CN" sz="6400" b="1" dirty="0">
               <a:solidFill>
@@ -5412,7 +5089,7 @@
         <p:spPr>
           <a:xfrm>
             <a:off x="0" y="5061182"/>
-            <a:ext cx="12192000" cy="830997"/>
+            <a:ext cx="12192000" cy="584775"/>
           </a:xfrm>
           <a:prstGeom prst="rect">
             <a:avLst/>
@@ -5427,33 +5104,19 @@
           <a:p>
             <a:pPr algn="ctr"/>
             <a:r>
-              <a:rPr lang="en-US" sz="4800" b="1" dirty="0">
+              <a:rPr lang="en-US" sz="3200" b="1" dirty="0">
                 <a:solidFill>
                   <a:srgbClr val="660033"/>
                 </a:solidFill>
+                <a:latin typeface="+mn-lt"/>
               </a:rPr>
-              <a:t>( </a:t>
-            </a:r>
-            <a:r>
-              <a:rPr lang="en-US" sz="4800" b="1" dirty="0" smtClean="0">
-                <a:solidFill>
-                  <a:srgbClr val="660033"/>
-                </a:solidFill>
-              </a:rPr>
-              <a:t>2 </a:t>
-            </a:r>
-            <a:r>
-              <a:rPr lang="en-US" sz="4800" b="1" dirty="0">
-                <a:solidFill>
-                  <a:srgbClr val="660033"/>
-                </a:solidFill>
-              </a:rPr>
-              <a:t>)</a:t>
-            </a:r>
-            <a:endParaRPr lang="vi-VN" sz="4800" b="1" dirty="0">
+              <a:t>( 2 / 4 )</a:t>
+            </a:r>
+            <a:endParaRPr lang="vi-VN" sz="3200" b="1" dirty="0">
               <a:solidFill>
                 <a:srgbClr val="660033"/>
               </a:solidFill>
+              <a:latin typeface="+mn-lt"/>
             </a:endParaRPr>
           </a:p>
         </p:txBody>
@@ -5468,13 +5131,6 @@
   <p:clrMapOvr>
     <a:masterClrMapping/>
   </p:clrMapOvr>
-  <p:timing>
-    <p:tnLst>
-      <p:par>
-        <p:cTn id="1" dur="indefinite" restart="never" nodeType="tmRoot"/>
-      </p:par>
-    </p:tnLst>
-  </p:timing>
 </p:sld>
 </file>
 
@@ -5528,17 +5184,7 @@
                 <a:latin typeface="Microsoft JhengHei" pitchFamily="34" charset="-120"/>
                 <a:ea typeface="Microsoft JhengHei" pitchFamily="34" charset="-120"/>
               </a:rPr>
-              <a:t>苦杯主嘗身體受</a:t>
-            </a:r>
-            <a:r>
-              <a:rPr lang="zh-CN" altLang="zh-TW" sz="6400" b="1" dirty="0">
-                <a:solidFill>
-                  <a:srgbClr val="660033"/>
-                </a:solidFill>
-                <a:latin typeface="Microsoft JhengHei" pitchFamily="34" charset="-120"/>
-                <a:ea typeface="Microsoft JhengHei" pitchFamily="34" charset="-120"/>
-              </a:rPr>
-              <a:t>傷</a:t>
+              <a:t>苦杯主嘗身體受傷</a:t>
             </a:r>
             <a:endParaRPr lang="en-US" altLang="zh-CN" sz="6400" b="1" dirty="0">
               <a:solidFill>
@@ -5560,17 +5206,7 @@
                 <a:latin typeface="Microsoft JhengHei" pitchFamily="34" charset="-120"/>
                 <a:ea typeface="Microsoft JhengHei" pitchFamily="34" charset="-120"/>
               </a:rPr>
-              <a:t>今</a:t>
-            </a:r>
-            <a:r>
-              <a:rPr lang="zh-CN" altLang="zh-TW" sz="6400" b="1" dirty="0">
-                <a:solidFill>
-                  <a:srgbClr val="660033"/>
-                </a:solidFill>
-                <a:latin typeface="Microsoft JhengHei" pitchFamily="34" charset="-120"/>
-                <a:ea typeface="Microsoft JhengHei" pitchFamily="34" charset="-120"/>
-              </a:rPr>
-              <a:t>賜福杯與我</a:t>
+              <a:t>今賜福杯與我</a:t>
             </a:r>
           </a:p>
         </p:txBody>
@@ -5584,7 +5220,7 @@
         <p:spPr>
           <a:xfrm>
             <a:off x="0" y="5061182"/>
-            <a:ext cx="12192000" cy="830997"/>
+            <a:ext cx="12192000" cy="646331"/>
           </a:xfrm>
           <a:prstGeom prst="rect">
             <a:avLst/>
@@ -5599,41 +5235,50 @@
           <a:p>
             <a:pPr algn="ctr"/>
             <a:r>
-              <a:rPr lang="en-US" sz="4800" b="1" dirty="0">
+              <a:rPr lang="en-US" sz="3600" b="1" dirty="0">
                 <a:solidFill>
                   <a:srgbClr val="660033"/>
                 </a:solidFill>
+                <a:latin typeface="+mn-lt"/>
+                <a:ea typeface="Microsoft JhengHei" panose="020B0604030504040204" pitchFamily="34" charset="-120"/>
               </a:rPr>
-              <a:t>( </a:t>
-            </a:r>
-            <a:r>
-              <a:rPr lang="en-US" sz="4800" b="1" dirty="0" smtClean="0">
+              <a:t>( 2 / 4 )</a:t>
+            </a:r>
+            <a:r>
+              <a:rPr lang="en-US" sz="3200" b="1" dirty="0">
                 <a:solidFill>
                   <a:srgbClr val="660033"/>
                 </a:solidFill>
+                <a:latin typeface="Microsoft JhengHei" panose="020B0604030504040204" pitchFamily="34" charset="-120"/>
+                <a:ea typeface="Microsoft JhengHei" panose="020B0604030504040204" pitchFamily="34" charset="-120"/>
               </a:rPr>
-              <a:t>2 )</a:t>
-            </a:r>
-            <a:r>
-              <a:rPr lang="en-US" sz="4800" b="1" dirty="0">
+              <a:t>( 2</a:t>
+            </a:r>
+            <a:r>
+              <a:rPr lang="zh-CN" altLang="en-US" sz="3200" b="1" dirty="0">
                 <a:solidFill>
                   <a:srgbClr val="660033"/>
                 </a:solidFill>
+                <a:latin typeface="Microsoft JhengHei" panose="020B0604030504040204" pitchFamily="34" charset="-120"/>
+                <a:ea typeface="Microsoft JhengHei" panose="020B0604030504040204" pitchFamily="34" charset="-120"/>
               </a:rPr>
-              <a:t> ( </a:t>
-            </a:r>
-            <a:r>
-              <a:rPr lang="en-US" sz="4800" b="1" dirty="0" smtClean="0">
+              <a:t>次</a:t>
+            </a:r>
+            <a:r>
+              <a:rPr lang="en-US" sz="3200" b="1" dirty="0">
                 <a:solidFill>
                   <a:srgbClr val="660033"/>
                 </a:solidFill>
+                <a:latin typeface="Microsoft JhengHei" panose="020B0604030504040204" pitchFamily="34" charset="-120"/>
+                <a:ea typeface="Microsoft JhengHei" panose="020B0604030504040204" pitchFamily="34" charset="-120"/>
               </a:rPr>
-              <a:t>x2 )</a:t>
-            </a:r>
-            <a:endParaRPr lang="vi-VN" sz="4800" b="1" dirty="0">
+              <a:t> )</a:t>
+            </a:r>
+            <a:endParaRPr lang="vi-VN" sz="3600" b="1" dirty="0">
               <a:solidFill>
                 <a:srgbClr val="660033"/>
               </a:solidFill>
+              <a:ea typeface="Microsoft JhengHei" panose="020B0604030504040204" pitchFamily="34" charset="-120"/>
             </a:endParaRPr>
           </a:p>
         </p:txBody>
@@ -5648,13 +5293,6 @@
   <p:clrMapOvr>
     <a:masterClrMapping/>
   </p:clrMapOvr>
-  <p:timing>
-    <p:tnLst>
-      <p:par>
-        <p:cTn id="1" dur="indefinite" restart="never" nodeType="tmRoot"/>
-      </p:par>
-    </p:tnLst>
-  </p:timing>
 </p:sld>
 </file>
 
@@ -5708,17 +5346,7 @@
                 <a:latin typeface="Microsoft JhengHei" pitchFamily="34" charset="-120"/>
                 <a:ea typeface="Microsoft JhengHei" pitchFamily="34" charset="-120"/>
               </a:rPr>
-              <a:t>主耶和華因罪動</a:t>
-            </a:r>
-            <a:r>
-              <a:rPr lang="zh-CN" altLang="zh-TW" sz="6400" b="1" dirty="0">
-                <a:solidFill>
-                  <a:srgbClr val="660033"/>
-                </a:solidFill>
-                <a:latin typeface="Microsoft JhengHei" pitchFamily="34" charset="-120"/>
-                <a:ea typeface="Microsoft JhengHei" pitchFamily="34" charset="-120"/>
-              </a:rPr>
-              <a:t>怒</a:t>
+              <a:t>主耶和華因罪動怒</a:t>
             </a:r>
             <a:endParaRPr lang="en-US" altLang="zh-CN" sz="6400" b="1" dirty="0">
               <a:solidFill>
@@ -5740,17 +5368,7 @@
                 <a:latin typeface="Microsoft JhengHei" pitchFamily="34" charset="-120"/>
                 <a:ea typeface="Microsoft JhengHei" pitchFamily="34" charset="-120"/>
               </a:rPr>
-              <a:t>震</a:t>
-            </a:r>
-            <a:r>
-              <a:rPr lang="zh-CN" altLang="zh-TW" sz="6400" b="1" dirty="0">
-                <a:solidFill>
-                  <a:srgbClr val="660033"/>
-                </a:solidFill>
-                <a:latin typeface="Microsoft JhengHei" pitchFamily="34" charset="-120"/>
-                <a:ea typeface="Microsoft JhengHei" pitchFamily="34" charset="-120"/>
-              </a:rPr>
-              <a:t>怒落在主頭</a:t>
+              <a:t>震怒落在主頭</a:t>
             </a:r>
           </a:p>
         </p:txBody>
@@ -5764,7 +5382,7 @@
         <p:spPr>
           <a:xfrm>
             <a:off x="0" y="5061182"/>
-            <a:ext cx="12192000" cy="830997"/>
+            <a:ext cx="12192000" cy="584775"/>
           </a:xfrm>
           <a:prstGeom prst="rect">
             <a:avLst/>
@@ -5779,33 +5397,19 @@
           <a:p>
             <a:pPr algn="ctr"/>
             <a:r>
-              <a:rPr lang="en-US" sz="4800" b="1" dirty="0">
+              <a:rPr lang="en-US" sz="3200" b="1" dirty="0">
                 <a:solidFill>
                   <a:srgbClr val="660033"/>
                 </a:solidFill>
+                <a:latin typeface="+mn-lt"/>
               </a:rPr>
-              <a:t>( </a:t>
-            </a:r>
-            <a:r>
-              <a:rPr lang="en-US" sz="4800" b="1" dirty="0" smtClean="0">
-                <a:solidFill>
-                  <a:srgbClr val="660033"/>
-                </a:solidFill>
-              </a:rPr>
-              <a:t>3 </a:t>
-            </a:r>
-            <a:r>
-              <a:rPr lang="en-US" sz="4800" b="1" dirty="0">
-                <a:solidFill>
-                  <a:srgbClr val="660033"/>
-                </a:solidFill>
-              </a:rPr>
-              <a:t>)</a:t>
-            </a:r>
-            <a:endParaRPr lang="vi-VN" sz="4800" b="1" dirty="0">
+              <a:t>( 3 / 4 )</a:t>
+            </a:r>
+            <a:endParaRPr lang="vi-VN" sz="3200" b="1" dirty="0">
               <a:solidFill>
                 <a:srgbClr val="660033"/>
               </a:solidFill>
+              <a:latin typeface="+mn-lt"/>
             </a:endParaRPr>
           </a:p>
         </p:txBody>
@@ -5820,13 +5424,6 @@
   <p:clrMapOvr>
     <a:masterClrMapping/>
   </p:clrMapOvr>
-  <p:timing>
-    <p:tnLst>
-      <p:par>
-        <p:cTn id="1" dur="indefinite" restart="never" nodeType="tmRoot"/>
-      </p:par>
-    </p:tnLst>
-  </p:timing>
 </p:sld>
 </file>
 
@@ -5880,17 +5477,7 @@
                 <a:latin typeface="Microsoft JhengHei" pitchFamily="34" charset="-120"/>
                 <a:ea typeface="Microsoft JhengHei" pitchFamily="34" charset="-120"/>
               </a:rPr>
-              <a:t>奇哉神怒都落在</a:t>
-            </a:r>
-            <a:r>
-              <a:rPr lang="zh-CN" altLang="zh-TW" sz="6400" b="1" dirty="0">
-                <a:solidFill>
-                  <a:srgbClr val="660033"/>
-                </a:solidFill>
-                <a:latin typeface="Microsoft JhengHei" pitchFamily="34" charset="-120"/>
-                <a:ea typeface="Microsoft JhengHei" pitchFamily="34" charset="-120"/>
-              </a:rPr>
-              <a:t>主</a:t>
+              <a:t>奇哉神怒都落在主</a:t>
             </a:r>
             <a:endParaRPr lang="en-US" altLang="zh-CN" sz="6400" b="1" dirty="0">
               <a:solidFill>
@@ -5912,17 +5499,7 @@
                 <a:latin typeface="Microsoft JhengHei" pitchFamily="34" charset="-120"/>
                 <a:ea typeface="Microsoft JhengHei" pitchFamily="34" charset="-120"/>
               </a:rPr>
-              <a:t>今</a:t>
-            </a:r>
-            <a:r>
-              <a:rPr lang="zh-CN" altLang="zh-TW" sz="6400" b="1" dirty="0">
-                <a:solidFill>
-                  <a:srgbClr val="660033"/>
-                </a:solidFill>
-                <a:latin typeface="Microsoft JhengHei" pitchFamily="34" charset="-120"/>
-                <a:ea typeface="Microsoft JhengHei" pitchFamily="34" charset="-120"/>
-              </a:rPr>
-              <a:t>我蒙恩深厚</a:t>
+              <a:t>今我蒙恩深厚</a:t>
             </a:r>
             <a:endParaRPr lang="en-US" altLang="zh-CN" sz="6400" b="1" dirty="0">
               <a:solidFill>
@@ -5943,7 +5520,7 @@
         <p:spPr>
           <a:xfrm>
             <a:off x="0" y="5061182"/>
-            <a:ext cx="12192000" cy="830997"/>
+            <a:ext cx="12192000" cy="584775"/>
           </a:xfrm>
           <a:prstGeom prst="rect">
             <a:avLst/>
@@ -5958,33 +5535,19 @@
           <a:p>
             <a:pPr algn="ctr"/>
             <a:r>
-              <a:rPr lang="en-US" sz="4800" b="1" dirty="0">
+              <a:rPr lang="en-US" sz="3200" b="1" dirty="0">
                 <a:solidFill>
                   <a:srgbClr val="660033"/>
                 </a:solidFill>
+                <a:latin typeface="+mn-lt"/>
               </a:rPr>
-              <a:t>( </a:t>
-            </a:r>
-            <a:r>
-              <a:rPr lang="en-US" sz="4800" b="1" dirty="0" smtClean="0">
-                <a:solidFill>
-                  <a:srgbClr val="660033"/>
-                </a:solidFill>
-              </a:rPr>
-              <a:t>3 </a:t>
-            </a:r>
-            <a:r>
-              <a:rPr lang="en-US" sz="4800" b="1" dirty="0">
-                <a:solidFill>
-                  <a:srgbClr val="660033"/>
-                </a:solidFill>
-              </a:rPr>
-              <a:t>)</a:t>
-            </a:r>
-            <a:endParaRPr lang="vi-VN" sz="4800" b="1" dirty="0">
+              <a:t>( 3 / 4 )</a:t>
+            </a:r>
+            <a:endParaRPr lang="vi-VN" sz="3200" b="1" dirty="0">
               <a:solidFill>
                 <a:srgbClr val="660033"/>
               </a:solidFill>
+              <a:latin typeface="+mn-lt"/>
             </a:endParaRPr>
           </a:p>
         </p:txBody>
@@ -5999,13 +5562,6 @@
   <p:clrMapOvr>
     <a:masterClrMapping/>
   </p:clrMapOvr>
-  <p:timing>
-    <p:tnLst>
-      <p:par>
-        <p:cTn id="1" dur="indefinite" restart="never" nodeType="tmRoot"/>
-      </p:par>
-    </p:tnLst>
-  </p:timing>
 </p:sld>
 </file>
 
